--- a/skills/presentations/assets/pptx/templates/06-resource-request.pptx
+++ b/skills/presentations/assets/pptx/templates/06-resource-request.pptx
@@ -5,15 +5,15 @@
     <p:sldMasterId xmlns:r="http://schemas.openxmlformats.org/officeDocument/2006/relationships" id="2147483648" r:id="rId1"/>
   </p:sldMasterIdLst>
   <p:notesMasterIdLst>
-    <p:notesMasterId r:id="R82ae9b6d1519479d"/>
+    <p:notesMasterId r:id="Rf2419651a7934c70"/>
   </p:notesMasterIdLst>
   <p:sldIdLst>
-    <p:sldId id="256" r:id="R2b5bbcfe05dd4f9b"/>
-    <p:sldId id="257" r:id="Re6972eb6848946e0"/>
-    <p:sldId id="258" r:id="R48d9358458e74fe0"/>
-    <p:sldId id="259" r:id="Rfd17e31f70bc44fe"/>
-    <p:sldId id="260" r:id="R55421a43b3a44dd5"/>
-    <p:sldId id="261" r:id="R0bd9fabe4cc742a7"/>
+    <p:sldId id="256" r:id="R8c490f7e65c943fd"/>
+    <p:sldId id="257" r:id="R638d8669b35c4061"/>
+    <p:sldId id="258" r:id="Rfe0dc50f421b4b6d"/>
+    <p:sldId id="259" r:id="R4f08cbbaa7de47ed"/>
+    <p:sldId id="260" r:id="R80d6b9edacc14021"/>
+    <p:sldId id="261" r:id="R224f5817ca7344cd"/>
   </p:sldIdLst>
   <p:sldSz cx="12192000" cy="6858000"/>
   <p:notesSz cx="6858000" cy="9144000"/>

--- a/skills/presentations/assets/pptx/templates/06-resource-request.pptx
+++ b/skills/presentations/assets/pptx/templates/06-resource-request.pptx
@@ -5,15 +5,16 @@
     <p:sldMasterId xmlns:r="http://schemas.openxmlformats.org/officeDocument/2006/relationships" id="2147483648" r:id="rId1"/>
   </p:sldMasterIdLst>
   <p:notesMasterIdLst>
-    <p:notesMasterId r:id="Rf2419651a7934c70"/>
+    <p:notesMasterId r:id="Rf3b8b6b3f914439b"/>
   </p:notesMasterIdLst>
   <p:sldIdLst>
-    <p:sldId id="256" r:id="R8c490f7e65c943fd"/>
-    <p:sldId id="257" r:id="R638d8669b35c4061"/>
-    <p:sldId id="258" r:id="Rfe0dc50f421b4b6d"/>
-    <p:sldId id="259" r:id="R4f08cbbaa7de47ed"/>
-    <p:sldId id="260" r:id="R80d6b9edacc14021"/>
-    <p:sldId id="261" r:id="R224f5817ca7344cd"/>
+    <p:sldId id="256" r:id="R8f14e5f789b74413"/>
+    <p:sldId id="257" r:id="R743959a693884d18"/>
+    <p:sldId id="258" r:id="R7f372d924aeb48ea"/>
+    <p:sldId id="259" r:id="R752c813578244480"/>
+    <p:sldId id="260" r:id="Rb471bff0dac74c66"/>
+    <p:sldId id="261" r:id="R30f7222670e14aa4"/>
+    <p:sldId id="262" r:id="Rf97f20a693e84c10"/>
   </p:sldIdLst>
   <p:sldSz cx="12192000" cy="6858000"/>
   <p:notesSz cx="6858000" cy="9144000"/>
@@ -479,6 +480,30 @@
               <a:t>Cover (template). Resource request</a:t>
             </a:r>
           </a:p>
+          <a:p xmlns:a="http://schemas.openxmlformats.org/drawingml/2006/main">
+            <a:r>
+              <a:rPr lang="en-US"/>
+              <a:t/>
+            </a:r>
+          </a:p>
+          <a:p xmlns:a="http://schemas.openxmlformats.org/drawingml/2006/main">
+            <a:r>
+              <a:rPr lang="en-US"/>
+              <a:t>Roadmap-backed headcount / resource business case</a:t>
+            </a:r>
+          </a:p>
+          <a:p xmlns:a="http://schemas.openxmlformats.org/drawingml/2006/main">
+            <a:r>
+              <a:rPr lang="en-US"/>
+              <a:t>EM Tools — Headcount planning: https://www.em-tools.io/engineering-manager-responsibilities/headcount-planning</a:t>
+            </a:r>
+          </a:p>
+          <a:p xmlns:a="http://schemas.openxmlformats.org/drawingml/2006/main">
+            <a:r>
+              <a:rPr lang="en-US"/>
+              <a:t>TPM influence without authority (when no budget ownership): https://www.mariogerard.com/how-to-influence-without-authority-as-a-tpm/</a:t>
+            </a:r>
+          </a:p>
         </p:txBody>
       </p:sp>
     </p:spTree>
@@ -531,7 +556,19 @@
           <a:p xmlns:a="http://schemas.openxmlformats.org/drawingml/2006/main">
             <a:r>
               <a:rPr lang="en-US"/>
-              <a:t>Trade-off decision, not comfort request.</a:t>
+              <a:t>Roadmap-backed headcount / resource business case</a:t>
+            </a:r>
+          </a:p>
+          <a:p xmlns:a="http://schemas.openxmlformats.org/drawingml/2006/main">
+            <a:r>
+              <a:rPr lang="en-US"/>
+              <a:t>EM Tools — Headcount planning: https://www.em-tools.io/engineering-manager-responsibilities/headcount-planning</a:t>
+            </a:r>
+          </a:p>
+          <a:p xmlns:a="http://schemas.openxmlformats.org/drawingml/2006/main">
+            <a:r>
+              <a:rPr lang="en-US"/>
+              <a:t>TPM influence without authority (when no budget ownership): https://www.mariogerard.com/how-to-influence-without-authority-as-a-tpm/</a:t>
             </a:r>
           </a:p>
         </p:txBody>
@@ -586,7 +623,7 @@
           <a:p xmlns:a="http://schemas.openxmlformats.org/drawingml/2006/main">
             <a:r>
               <a:rPr lang="en-US"/>
-              <a:t>Backwards from roadmap.</a:t>
+              <a:t>Trade-off decision, not comfort request.</a:t>
             </a:r>
           </a:p>
         </p:txBody>
@@ -641,7 +678,7 @@
           <a:p xmlns:a="http://schemas.openxmlformats.org/drawingml/2006/main">
             <a:r>
               <a:rPr lang="en-US"/>
-              <a:t>Make leadership choose trade-offs.</a:t>
+              <a:t>Backwards from roadmap.</a:t>
             </a:r>
           </a:p>
         </p:txBody>
@@ -696,7 +733,7 @@
           <a:p xmlns:a="http://schemas.openxmlformats.org/drawingml/2006/main">
             <a:r>
               <a:rPr lang="en-US"/>
-              <a:t>Walk trade-offs; land recommendation.</a:t>
+              <a:t>Make leadership choose trade-offs.</a:t>
             </a:r>
           </a:p>
         </p:txBody>
@@ -710,6 +747,61 @@
 </file>
 
 <file path=ppt/notesSlides/notesSlide6.xml><?xml version="1.0" encoding="utf-8"?>
+<p:notes xmlns:p="http://schemas.openxmlformats.org/presentationml/2006/main">
+  <p:cSld>
+    <p:spTree>
+      <p:nvGrpSpPr>
+        <p:cNvPr id="1" name=""/>
+        <p:cNvGrpSpPr/>
+        <p:nvPr/>
+      </p:nvGrpSpPr>
+      <p:grpSpPr>
+        <a:xfrm xmlns:a="http://schemas.openxmlformats.org/drawingml/2006/main"/>
+      </p:grpSpPr>
+      <p:sp>
+        <p:nvSpPr>
+          <p:cNvPr id="2" name="Slide Image Placeholder 1"/>
+          <p:cNvSpPr/>
+          <p:nvPr>
+            <p:ph type="sldImg" idx="0"/>
+          </p:nvPr>
+        </p:nvSpPr>
+        <p:spPr/>
+        <p:txBody>
+          <a:bodyPr xmlns:a="http://schemas.openxmlformats.org/drawingml/2006/main"/>
+          <a:lstStyle xmlns:a="http://schemas.openxmlformats.org/drawingml/2006/main"/>
+          <a:p xmlns:a="http://schemas.openxmlformats.org/drawingml/2006/main"/>
+        </p:txBody>
+      </p:sp>
+      <p:sp>
+        <p:nvSpPr>
+          <p:cNvPr id="3" name="Notes Placeholder 2"/>
+          <p:cNvSpPr/>
+          <p:nvPr>
+            <p:ph type="body" idx="1"/>
+          </p:nvPr>
+        </p:nvSpPr>
+        <p:spPr/>
+        <p:txBody>
+          <a:bodyPr xmlns:a="http://schemas.openxmlformats.org/drawingml/2006/main"/>
+          <a:lstStyle xmlns:a="http://schemas.openxmlformats.org/drawingml/2006/main"/>
+          <a:p xmlns:a="http://schemas.openxmlformats.org/drawingml/2006/main">
+            <a:r>
+              <a:rPr lang="en-US"/>
+              <a:t>Walk trade-offs; land recommendation.</a:t>
+            </a:r>
+          </a:p>
+        </p:txBody>
+      </p:sp>
+    </p:spTree>
+  </p:cSld>
+  <p:clrMapOvr>
+    <a:masterClrMapping xmlns:a="http://schemas.openxmlformats.org/drawingml/2006/main"/>
+  </p:clrMapOvr>
+</p:notes>
+</file>
+
+<file path=ppt/notesSlides/notesSlide7.xml><?xml version="1.0" encoding="utf-8"?>
 <p:notes xmlns:p="http://schemas.openxmlformats.org/presentationml/2006/main">
   <p:cSld>
     <p:spTree>
@@ -1079,8 +1171,8 @@
         </p:nvSpPr>
         <p:spPr>
           <a:xfrm xmlns:a="http://schemas.openxmlformats.org/drawingml/2006/main">
-            <a:off x="504000" y="1008000"/>
-            <a:ext cx="11088000" cy="324000"/>
+            <a:off x="504000" y="936000"/>
+            <a:ext cx="11088000" cy="306000"/>
           </a:xfrm>
           <a:prstGeom xmlns:a="http://schemas.openxmlformats.org/drawingml/2006/main" prst="rect">
             <a:avLst/>
@@ -1111,8 +1203,8 @@
         </p:nvSpPr>
         <p:spPr>
           <a:xfrm xmlns:a="http://schemas.openxmlformats.org/drawingml/2006/main">
-            <a:off x="504000" y="1440000"/>
-            <a:ext cx="11088000" cy="936000"/>
+            <a:off x="504000" y="1332000"/>
+            <a:ext cx="11088000" cy="900000"/>
           </a:xfrm>
           <a:prstGeom xmlns:a="http://schemas.openxmlformats.org/drawingml/2006/main" prst="rect">
             <a:avLst/>
@@ -1123,7 +1215,7 @@
           <a:lstStyle xmlns:a="http://schemas.openxmlformats.org/drawingml/2006/main"/>
           <a:p xmlns:a="http://schemas.openxmlformats.org/drawingml/2006/main">
             <a:r>
-              <a:rPr lang="en-US" sz="3400" b="1">
+              <a:rPr lang="en-US" sz="3200" b="1">
                 <a:solidFill>
                   <a:srgbClr val="FFFFFF"/>
                 </a:solidFill>
@@ -1143,8 +1235,8 @@
         </p:nvSpPr>
         <p:spPr>
           <a:xfrm xmlns:a="http://schemas.openxmlformats.org/drawingml/2006/main">
-            <a:off x="504000" y="2520000"/>
-            <a:ext cx="11088000" cy="720000"/>
+            <a:off x="504000" y="2340000"/>
+            <a:ext cx="11088000" cy="648000"/>
           </a:xfrm>
           <a:prstGeom xmlns:a="http://schemas.openxmlformats.org/drawingml/2006/main" prst="rect">
             <a:avLst/>
@@ -1155,7 +1247,7 @@
           <a:lstStyle xmlns:a="http://schemas.openxmlformats.org/drawingml/2006/main"/>
           <a:p xmlns:a="http://schemas.openxmlformats.org/drawingml/2006/main">
             <a:r>
-              <a:rPr lang="en-US" sz="1700" b="0">
+              <a:rPr lang="en-US" sz="1600" b="0">
                 <a:solidFill>
                   <a:srgbClr val="CADCFC"/>
                 </a:solidFill>
@@ -1170,6 +1262,38 @@
       <p:sp>
         <p:nvSpPr>
           <p:cNvPr id="100003" name="TextBox 4"/>
+          <p:cNvSpPr txBox="1"/>
+          <p:nvPr/>
+        </p:nvSpPr>
+        <p:spPr>
+          <a:xfrm xmlns:a="http://schemas.openxmlformats.org/drawingml/2006/main">
+            <a:off x="504000" y="3240000"/>
+            <a:ext cx="11088000" cy="576000"/>
+          </a:xfrm>
+          <a:prstGeom xmlns:a="http://schemas.openxmlformats.org/drawingml/2006/main" prst="rect">
+            <a:avLst/>
+          </a:prstGeom>
+        </p:spPr>
+        <p:txBody>
+          <a:bodyPr xmlns:a="http://schemas.openxmlformats.org/drawingml/2006/main"/>
+          <a:lstStyle xmlns:a="http://schemas.openxmlformats.org/drawingml/2006/main"/>
+          <a:p xmlns:a="http://schemas.openxmlformats.org/drawingml/2006/main">
+            <a:r>
+              <a:rPr lang="en-US" sz="1400" b="0">
+                <a:solidFill>
+                  <a:srgbClr val="A0C4E8"/>
+                </a:solidFill>
+                <a:latin typeface="Calibri"/>
+                <a:ea typeface="Calibri"/>
+              </a:rPr>
+              <a:t>Pattern: Roadmap-backed headcount / resource business case</a:t>
+            </a:r>
+          </a:p>
+        </p:txBody>
+      </p:sp>
+      <p:sp>
+        <p:nvSpPr>
+          <p:cNvPr id="100004" name="TextBox 5"/>
           <p:cNvSpPr txBox="1"/>
           <p:nvPr/>
         </p:nvSpPr>
@@ -1205,6 +1329,279 @@
 </file>
 
 <file path=ppt/slides/slide2.xml><?xml version="1.0" encoding="utf-8"?>
+<p:sld xmlns:p="http://schemas.openxmlformats.org/presentationml/2006/main">
+  <p:cSld name="Pattern provenance">
+    <p:bg>
+      <p:bgPr>
+        <a:solidFill xmlns:a="http://schemas.openxmlformats.org/drawingml/2006/main">
+          <a:srgbClr val="F4F7FC"/>
+        </a:solidFill>
+      </p:bgPr>
+    </p:bg>
+    <p:spTree>
+      <p:nvGrpSpPr>
+        <p:cNvPr id="1" name=""/>
+        <p:cNvGrpSpPr/>
+        <p:nvPr/>
+      </p:nvGrpSpPr>
+      <p:grpSpPr/>
+      <p:sp>
+        <p:nvSpPr>
+          <p:cNvPr id="100005" name="TextBox 1"/>
+          <p:cNvSpPr txBox="1"/>
+          <p:nvPr/>
+        </p:nvSpPr>
+        <p:spPr>
+          <a:xfrm xmlns:a="http://schemas.openxmlformats.org/drawingml/2006/main">
+            <a:off x="504000" y="270000"/>
+            <a:ext cx="11088000" cy="270000"/>
+          </a:xfrm>
+          <a:prstGeom xmlns:a="http://schemas.openxmlformats.org/drawingml/2006/main" prst="rect">
+            <a:avLst/>
+          </a:prstGeom>
+        </p:spPr>
+        <p:txBody>
+          <a:bodyPr xmlns:a="http://schemas.openxmlformats.org/drawingml/2006/main"/>
+          <a:lstStyle xmlns:a="http://schemas.openxmlformats.org/drawingml/2006/main"/>
+          <a:p xmlns:a="http://schemas.openxmlformats.org/drawingml/2006/main">
+            <a:r>
+              <a:rPr lang="en-US" sz="1100" b="1">
+                <a:solidFill>
+                  <a:srgbClr val="2B6CB0"/>
+                </a:solidFill>
+                <a:latin typeface="Calibri"/>
+                <a:ea typeface="Calibri"/>
+              </a:rPr>
+              <a:t>WHERE THIS DECK SHAPE COMES FROM</a:t>
+            </a:r>
+          </a:p>
+        </p:txBody>
+      </p:sp>
+      <p:sp>
+        <p:nvSpPr>
+          <p:cNvPr id="100006" name="TextBox 2"/>
+          <p:cNvSpPr txBox="1"/>
+          <p:nvPr/>
+        </p:nvSpPr>
+        <p:spPr>
+          <a:xfrm xmlns:a="http://schemas.openxmlformats.org/drawingml/2006/main">
+            <a:off x="504000" y="558000"/>
+            <a:ext cx="11088000" cy="612000"/>
+          </a:xfrm>
+          <a:prstGeom xmlns:a="http://schemas.openxmlformats.org/drawingml/2006/main" prst="rect">
+            <a:avLst/>
+          </a:prstGeom>
+        </p:spPr>
+        <p:txBody>
+          <a:bodyPr xmlns:a="http://schemas.openxmlformats.org/drawingml/2006/main"/>
+          <a:lstStyle xmlns:a="http://schemas.openxmlformats.org/drawingml/2006/main"/>
+          <a:p xmlns:a="http://schemas.openxmlformats.org/drawingml/2006/main">
+            <a:r>
+              <a:rPr lang="en-US" sz="2800" b="1">
+                <a:solidFill>
+                  <a:srgbClr val="1A202C"/>
+                </a:solidFill>
+                <a:latin typeface="Calibri"/>
+                <a:ea typeface="Calibri"/>
+              </a:rPr>
+              <a:t>Pattern provenance</a:t>
+            </a:r>
+          </a:p>
+        </p:txBody>
+      </p:sp>
+      <p:sp>
+        <p:nvSpPr>
+          <p:cNvPr id="100007" name="TextBox 3"/>
+          <p:cNvSpPr txBox="1"/>
+          <p:nvPr/>
+        </p:nvSpPr>
+        <p:spPr>
+          <a:xfrm xmlns:a="http://schemas.openxmlformats.org/drawingml/2006/main">
+            <a:off x="504000" y="1260000"/>
+            <a:ext cx="11088000" cy="4860000"/>
+          </a:xfrm>
+          <a:prstGeom xmlns:a="http://schemas.openxmlformats.org/drawingml/2006/main" prst="rect">
+            <a:avLst/>
+          </a:prstGeom>
+          <a:solidFill xmlns:a="http://schemas.openxmlformats.org/drawingml/2006/main">
+            <a:srgbClr val="FFFFFF"/>
+          </a:solidFill>
+        </p:spPr>
+        <p:txBody>
+          <a:bodyPr xmlns:a="http://schemas.openxmlformats.org/drawingml/2006/main"/>
+          <a:lstStyle xmlns:a="http://schemas.openxmlformats.org/drawingml/2006/main"/>
+          <a:p xmlns:a="http://schemas.openxmlformats.org/drawingml/2006/main">
+            <a:r>
+              <a:rPr lang="en-US" sz="1500" b="0">
+                <a:solidFill>
+                  <a:srgbClr val="1A202C"/>
+                </a:solidFill>
+                <a:latin typeface="Calibri"/>
+                <a:ea typeface="Calibri"/>
+              </a:rPr>
+              <a:t>Public pattern (structure only — not a confidential company deck):</a:t>
+            </a:r>
+          </a:p>
+          <a:p xmlns:a="http://schemas.openxmlformats.org/drawingml/2006/main">
+            <a:r>
+              <a:rPr lang="en-US" sz="1500" b="0">
+                <a:solidFill>
+                  <a:srgbClr val="1A202C"/>
+                </a:solidFill>
+                <a:latin typeface="Calibri"/>
+                <a:ea typeface="Calibri"/>
+              </a:rPr>
+              <a:t/>
+            </a:r>
+          </a:p>
+          <a:p xmlns:a="http://schemas.openxmlformats.org/drawingml/2006/main">
+            <a:r>
+              <a:rPr lang="en-US" sz="1500" b="0">
+                <a:solidFill>
+                  <a:srgbClr val="1A202C"/>
+                </a:solidFill>
+                <a:latin typeface="Calibri"/>
+                <a:ea typeface="Calibri"/>
+              </a:rPr>
+              <a:t>Roadmap-backed headcount / resource business case</a:t>
+            </a:r>
+          </a:p>
+          <a:p xmlns:a="http://schemas.openxmlformats.org/drawingml/2006/main">
+            <a:r>
+              <a:rPr lang="en-US" sz="1500" b="0">
+                <a:solidFill>
+                  <a:srgbClr val="1A202C"/>
+                </a:solidFill>
+                <a:latin typeface="Calibri"/>
+                <a:ea typeface="Calibri"/>
+              </a:rPr>
+              <a:t/>
+            </a:r>
+          </a:p>
+          <a:p xmlns:a="http://schemas.openxmlformats.org/drawingml/2006/main">
+            <a:r>
+              <a:rPr lang="en-US" sz="1500" b="0">
+                <a:solidFill>
+                  <a:srgbClr val="1A202C"/>
+                </a:solidFill>
+                <a:latin typeface="Calibri"/>
+                <a:ea typeface="Calibri"/>
+              </a:rPr>
+              <a:t>• EM Tools — Headcount planning</a:t>
+            </a:r>
+          </a:p>
+          <a:p xmlns:a="http://schemas.openxmlformats.org/drawingml/2006/main">
+            <a:r>
+              <a:rPr lang="en-US" sz="1500" b="0">
+                <a:solidFill>
+                  <a:srgbClr val="1A202C"/>
+                </a:solidFill>
+                <a:latin typeface="Calibri"/>
+                <a:ea typeface="Calibri"/>
+              </a:rPr>
+              <a:t>  https://www.em-tools.io/engineering-manager-responsibilities/headcount-planning</a:t>
+            </a:r>
+          </a:p>
+          <a:p xmlns:a="http://schemas.openxmlformats.org/drawingml/2006/main">
+            <a:r>
+              <a:rPr lang="en-US" sz="1500" b="0">
+                <a:solidFill>
+                  <a:srgbClr val="1A202C"/>
+                </a:solidFill>
+                <a:latin typeface="Calibri"/>
+                <a:ea typeface="Calibri"/>
+              </a:rPr>
+              <a:t>• TPM influence without authority (when no budget ownership)</a:t>
+            </a:r>
+          </a:p>
+          <a:p xmlns:a="http://schemas.openxmlformats.org/drawingml/2006/main">
+            <a:r>
+              <a:rPr lang="en-US" sz="1500" b="0">
+                <a:solidFill>
+                  <a:srgbClr val="1A202C"/>
+                </a:solidFill>
+                <a:latin typeface="Calibri"/>
+                <a:ea typeface="Calibri"/>
+              </a:rPr>
+              <a:t>  https://www.mariogerard.com/how-to-influence-without-authority-as-a-tpm/</a:t>
+            </a:r>
+          </a:p>
+          <a:p xmlns:a="http://schemas.openxmlformats.org/drawingml/2006/main">
+            <a:r>
+              <a:rPr lang="en-US" sz="1500" b="0">
+                <a:solidFill>
+                  <a:srgbClr val="1A202C"/>
+                </a:solidFill>
+                <a:latin typeface="Calibri"/>
+                <a:ea typeface="Calibri"/>
+              </a:rPr>
+              <a:t/>
+            </a:r>
+          </a:p>
+          <a:p xmlns:a="http://schemas.openxmlformats.org/drawingml/2006/main">
+            <a:r>
+              <a:rPr lang="en-US" sz="1500" b="0">
+                <a:solidFill>
+                  <a:srgbClr val="1A202C"/>
+                </a:solidFill>
+                <a:latin typeface="Calibri"/>
+                <a:ea typeface="Calibri"/>
+              </a:rPr>
+              <a:t>How to use: copy section order and decision verbs; replace with your metrics.</a:t>
+            </a:r>
+          </a:p>
+          <a:p xmlns:a="http://schemas.openxmlformats.org/drawingml/2006/main">
+            <a:r>
+              <a:rPr lang="en-US" sz="1500" b="0">
+                <a:solidFill>
+                  <a:srgbClr val="1A202C"/>
+                </a:solidFill>
+                <a:latin typeface="Calibri"/>
+                <a:ea typeface="Calibri"/>
+              </a:rPr>
+              <a:t>In-repo: skills/presentations/classic-public-cases.md</a:t>
+            </a:r>
+          </a:p>
+        </p:txBody>
+      </p:sp>
+      <p:sp>
+        <p:nvSpPr>
+          <p:cNvPr id="100008" name="TextBox 4"/>
+          <p:cNvSpPr txBox="1"/>
+          <p:nvPr/>
+        </p:nvSpPr>
+        <p:spPr>
+          <a:xfrm xmlns:a="http://schemas.openxmlformats.org/drawingml/2006/main">
+            <a:off x="504000" y="6426000"/>
+            <a:ext cx="11088000" cy="306000"/>
+          </a:xfrm>
+          <a:prstGeom xmlns:a="http://schemas.openxmlformats.org/drawingml/2006/main" prst="rect">
+            <a:avLst/>
+          </a:prstGeom>
+        </p:spPr>
+        <p:txBody>
+          <a:bodyPr xmlns:a="http://schemas.openxmlformats.org/drawingml/2006/main"/>
+          <a:lstStyle xmlns:a="http://schemas.openxmlformats.org/drawingml/2006/main"/>
+          <a:p xmlns:a="http://schemas.openxmlformats.org/drawingml/2006/main">
+            <a:r>
+              <a:rPr lang="en-US" sz="1100" b="0">
+                <a:solidFill>
+                  <a:srgbClr val="718096"/>
+                </a:solidFill>
+                <a:latin typeface="Calibri"/>
+                <a:ea typeface="Calibri"/>
+              </a:rPr>
+              <a:t>Team X  ·  Program Alpha  ·  Qn YYYY  ·  TEMPLATE — replace placeholders</a:t>
+            </a:r>
+          </a:p>
+        </p:txBody>
+      </p:sp>
+    </p:spTree>
+  </p:cSld>
+</p:sld>
+</file>
+
+<file path=ppt/slides/slide3.xml><?xml version="1.0" encoding="utf-8"?>
 <p:sld xmlns:p="http://schemas.openxmlformats.org/presentationml/2006/main">
   <p:cSld name="BLUF — resource ask">
     <p:bg>
@@ -1223,7 +1620,7 @@
       <p:grpSpPr/>
       <p:sp>
         <p:nvSpPr>
-          <p:cNvPr id="100004" name="TextBox 1"/>
+          <p:cNvPr id="100009" name="TextBox 1"/>
           <p:cNvSpPr txBox="1"/>
           <p:nvPr/>
         </p:nvSpPr>
@@ -1255,7 +1652,7 @@
       </p:sp>
       <p:sp>
         <p:nvSpPr>
-          <p:cNvPr id="100005" name="TextBox 2"/>
+          <p:cNvPr id="100010" name="TextBox 2"/>
           <p:cNvSpPr txBox="1"/>
           <p:nvPr/>
         </p:nvSpPr>
@@ -1287,7 +1684,7 @@
       </p:sp>
       <p:sp>
         <p:nvSpPr>
-          <p:cNvPr id="100006" name="TextBox 3"/>
+          <p:cNvPr id="100011" name="TextBox 3"/>
           <p:cNvSpPr txBox="1"/>
           <p:nvPr/>
         </p:nvSpPr>
@@ -1322,7 +1719,7 @@
       </p:sp>
       <p:sp>
         <p:nvSpPr>
-          <p:cNvPr id="100007" name="TextBox 4"/>
+          <p:cNvPr id="100012" name="TextBox 4"/>
           <p:cNvSpPr txBox="1"/>
           <p:nvPr/>
         </p:nvSpPr>
@@ -1393,7 +1790,7 @@
       </p:sp>
       <p:sp>
         <p:nvSpPr>
-          <p:cNvPr id="100008" name="TextBox 5"/>
+          <p:cNvPr id="100013" name="TextBox 5"/>
           <p:cNvSpPr txBox="1"/>
           <p:nvPr/>
         </p:nvSpPr>
@@ -1428,7 +1825,7 @@
 </p:sld>
 </file>
 
-<file path=ppt/slides/slide3.xml><?xml version="1.0" encoding="utf-8"?>
+<file path=ppt/slides/slide4.xml><?xml version="1.0" encoding="utf-8"?>
 <p:sld xmlns:p="http://schemas.openxmlformats.org/presentationml/2006/main">
   <p:cSld name="Linked roadmap outcomes">
     <p:bg>
@@ -1447,7 +1844,7 @@
       <p:grpSpPr/>
       <p:sp>
         <p:nvSpPr>
-          <p:cNvPr id="100009" name="TextBox 1"/>
+          <p:cNvPr id="100014" name="TextBox 1"/>
           <p:cNvSpPr txBox="1"/>
           <p:nvPr/>
         </p:nvSpPr>
@@ -1479,7 +1876,7 @@
       </p:sp>
       <p:sp>
         <p:nvSpPr>
-          <p:cNvPr id="100010" name="TextBox 2"/>
+          <p:cNvPr id="100015" name="TextBox 2"/>
           <p:cNvSpPr txBox="1"/>
           <p:nvPr/>
         </p:nvSpPr>
@@ -1562,7 +1959,7 @@
       </p:sp>
       <p:sp>
         <p:nvSpPr>
-          <p:cNvPr id="100011" name="TextBox 3"/>
+          <p:cNvPr id="100016" name="TextBox 3"/>
           <p:cNvSpPr txBox="1"/>
           <p:nvPr/>
         </p:nvSpPr>
@@ -1597,7 +1994,7 @@
 </p:sld>
 </file>
 
-<file path=ppt/slides/slide4.xml><?xml version="1.0" encoding="utf-8"?>
+<file path=ppt/slides/slide5.xml><?xml version="1.0" encoding="utf-8"?>
 <p:sld xmlns:p="http://schemas.openxmlformats.org/presentationml/2006/main">
   <p:cSld name="If declined (explicit)">
     <p:bg>
@@ -1616,7 +2013,7 @@
       <p:grpSpPr/>
       <p:sp>
         <p:nvSpPr>
-          <p:cNvPr id="100012" name="TextBox 1"/>
+          <p:cNvPr id="100017" name="TextBox 1"/>
           <p:cNvSpPr txBox="1"/>
           <p:nvPr/>
         </p:nvSpPr>
@@ -1648,7 +2045,7 @@
       </p:sp>
       <p:sp>
         <p:nvSpPr>
-          <p:cNvPr id="100013" name="TextBox 2"/>
+          <p:cNvPr id="100018" name="TextBox 2"/>
           <p:cNvSpPr txBox="1"/>
           <p:nvPr/>
         </p:nvSpPr>
@@ -1707,7 +2104,7 @@
       </p:sp>
       <p:sp>
         <p:nvSpPr>
-          <p:cNvPr id="100014" name="TextBox 3"/>
+          <p:cNvPr id="100019" name="TextBox 3"/>
           <p:cNvSpPr txBox="1"/>
           <p:nvPr/>
         </p:nvSpPr>
@@ -1742,7 +2139,7 @@
 </p:sld>
 </file>
 
-<file path=ppt/slides/slide5.xml><?xml version="1.0" encoding="utf-8"?>
+<file path=ppt/slides/slide6.xml><?xml version="1.0" encoding="utf-8"?>
 <p:sld xmlns:p="http://schemas.openxmlformats.org/presentationml/2006/main">
   <p:cSld name="Options &amp; recommendation">
     <p:bg>
@@ -1761,7 +2158,7 @@
       <p:grpSpPr/>
       <p:sp>
         <p:nvSpPr>
-          <p:cNvPr id="100015" name="TextBox 1"/>
+          <p:cNvPr id="100020" name="TextBox 1"/>
           <p:cNvSpPr txBox="1"/>
           <p:nvPr/>
         </p:nvSpPr>
@@ -1793,7 +2190,7 @@
       </p:sp>
       <p:sp>
         <p:nvSpPr>
-          <p:cNvPr id="100016" name="TextBox 2"/>
+          <p:cNvPr id="100021" name="TextBox 2"/>
           <p:cNvSpPr txBox="1"/>
           <p:nvPr/>
         </p:nvSpPr>
@@ -1825,7 +2222,7 @@
       </p:sp>
       <p:graphicFrame>
         <p:nvGraphicFramePr>
-          <p:cNvPr id="100017" name="Table 1"/>
+          <p:cNvPr id="100022" name="Table 1"/>
           <p:cNvGraphicFramePr/>
           <p:nvPr/>
         </p:nvGraphicFramePr>
@@ -2225,7 +2622,7 @@
       </p:graphicFrame>
       <p:sp>
         <p:nvSpPr>
-          <p:cNvPr id="100018" name="TextBox 3"/>
+          <p:cNvPr id="100023" name="TextBox 3"/>
           <p:cNvSpPr txBox="1"/>
           <p:nvPr/>
         </p:nvSpPr>
@@ -2260,7 +2657,7 @@
 </p:sld>
 </file>
 
-<file path=ppt/slides/slide6.xml><?xml version="1.0" encoding="utf-8"?>
+<file path=ppt/slides/slide7.xml><?xml version="1.0" encoding="utf-8"?>
 <p:sld xmlns:p="http://schemas.openxmlformats.org/presentationml/2006/main">
   <p:cSld name="Decision &amp; ask">
     <p:bg>
@@ -2279,7 +2676,7 @@
       <p:grpSpPr/>
       <p:sp>
         <p:nvSpPr>
-          <p:cNvPr id="100019" name="TextBox 1"/>
+          <p:cNvPr id="100024" name="TextBox 1"/>
           <p:cNvSpPr txBox="1"/>
           <p:nvPr/>
         </p:nvSpPr>
@@ -2311,7 +2708,7 @@
       </p:sp>
       <p:sp>
         <p:nvSpPr>
-          <p:cNvPr id="100020" name="TextBox 2"/>
+          <p:cNvPr id="100025" name="TextBox 2"/>
           <p:cNvSpPr txBox="1"/>
           <p:nvPr/>
         </p:nvSpPr>
@@ -2343,7 +2740,7 @@
       </p:sp>
       <p:sp>
         <p:nvSpPr>
-          <p:cNvPr id="100021" name="TextBox 3"/>
+          <p:cNvPr id="100026" name="TextBox 3"/>
           <p:cNvSpPr txBox="1"/>
           <p:nvPr/>
         </p:nvSpPr>
@@ -2402,7 +2799,7 @@
       </p:sp>
       <p:sp>
         <p:nvSpPr>
-          <p:cNvPr id="100022" name="TextBox 4"/>
+          <p:cNvPr id="100027" name="TextBox 4"/>
           <p:cNvSpPr txBox="1"/>
           <p:nvPr/>
         </p:nvSpPr>

--- a/skills/presentations/assets/pptx/templates/06-resource-request.pptx
+++ b/skills/presentations/assets/pptx/templates/06-resource-request.pptx
@@ -5,16 +5,16 @@
     <p:sldMasterId xmlns:r="http://schemas.openxmlformats.org/officeDocument/2006/relationships" id="2147483648" r:id="rId1"/>
   </p:sldMasterIdLst>
   <p:notesMasterIdLst>
-    <p:notesMasterId r:id="Rf3b8b6b3f914439b"/>
+    <p:notesMasterId r:id="Ref7d0eb69a154ce1"/>
   </p:notesMasterIdLst>
   <p:sldIdLst>
-    <p:sldId id="256" r:id="R8f14e5f789b74413"/>
-    <p:sldId id="257" r:id="R743959a693884d18"/>
-    <p:sldId id="258" r:id="R7f372d924aeb48ea"/>
-    <p:sldId id="259" r:id="R752c813578244480"/>
-    <p:sldId id="260" r:id="Rb471bff0dac74c66"/>
-    <p:sldId id="261" r:id="R30f7222670e14aa4"/>
-    <p:sldId id="262" r:id="Rf97f20a693e84c10"/>
+    <p:sldId id="256" r:id="R001d9007589f4119"/>
+    <p:sldId id="257" r:id="R2230b7e94dce4ff8"/>
+    <p:sldId id="258" r:id="R9131ca4910454f78"/>
+    <p:sldId id="259" r:id="R872a4b9ac2ed4108"/>
+    <p:sldId id="260" r:id="R174d05377cc648b9"/>
+    <p:sldId id="261" r:id="Rcebf838558e24cc1"/>
+    <p:sldId id="262" r:id="R3cdfdca2bc394b49"/>
   </p:sldIdLst>
   <p:sldSz cx="12192000" cy="6858000"/>
   <p:notesSz cx="6858000" cy="9144000"/>
@@ -1559,7 +1559,19 @@
                 <a:latin typeface="Calibri"/>
                 <a:ea typeface="Calibri"/>
               </a:rPr>
-              <a:t>In-repo: skills/presentations/classic-public-cases.md</a:t>
+              <a:t>CONTENT TEMPLATE ONLY — do not copy visual design (colors, margins, fonts) as a brand system.</a:t>
+            </a:r>
+          </a:p>
+          <a:p xmlns:a="http://schemas.openxmlformats.org/drawingml/2006/main">
+            <a:r>
+              <a:rPr lang="en-US" sz="1500" b="0">
+                <a:solidFill>
+                  <a:srgbClr val="1A202C"/>
+                </a:solidFill>
+                <a:latin typeface="Calibri"/>
+                <a:ea typeface="Calibri"/>
+              </a:rPr>
+              <a:t>In-repo: skills/presentations/classic-public-cases.md · assets/README.md (agent notice)</a:t>
             </a:r>
           </a:p>
         </p:txBody>
